--- a/AIFinanceCrashcourse/slides/Module-08-Fund-Administration-NAV.pptx
+++ b/AIFinanceCrashcourse/slides/Module-08-Fund-Administration-NAV.pptx
@@ -3268,7 +3268,7 @@
                   <a:srgbClr val="C9A227"/>
                 </a:solidFill>
               </a:rPr>
-              <a:t>ISBMS · PGDM 2025–27 · SEMESTER III · SESSION 8 OF 10</a:t>
+              <a:t>AI IN FINANCE · THE COMPLETE CRASH COURSE · MODULE 8 OF 10</a:t>
             </a:r>
           </a:p>
         </p:txBody>
@@ -3412,7 +3412,7 @@
                   <a:srgbClr val="8FA1C4"/>
                 </a:solidFill>
               </a:rPr>
-              <a:t>Faculty · Agentic AI &amp; Advanced Analytics in Finance (PGDM-SEM3-SPEC-AIFINANCE)</a:t>
+              <a:t>AI in Finance: The Complete Crash Course</a:t>
             </a:r>
           </a:p>
           <a:p>
@@ -3427,7 +3427,7 @@
                   <a:srgbClr val="C9A227"/>
                 </a:solidFill>
               </a:rPr>
-              <a:t>tejasgjadhav.github.io/AIFINANCE</a:t>
+              <a:t>tejasgjadhav.github.io/AIFinanceCrashcourse</a:t>
             </a:r>
           </a:p>
         </p:txBody>
@@ -3705,7 +3705,7 @@
                   <a:srgbClr val="8FA1C4"/>
                 </a:solidFill>
               </a:rPr>
-              <a:t>ISBMS · PGDM 2025–27 · AGENTIC AI &amp; ADVANCED ANALYTICS IN FINANCE</a:t>
+              <a:t>AI IN FINANCE · THE COMPLETE CRASH COURSE</a:t>
             </a:r>
           </a:p>
         </p:txBody>
@@ -4206,7 +4206,7 @@
                   <a:srgbClr val="C9A227"/>
                 </a:solidFill>
               </a:rPr>
-              <a:t>▪  </a:t>
+              <a:t>▪</a:t>
             </a:r>
             <a:r>
               <a:rPr sz="900" b="0">
@@ -4248,7 +4248,7 @@
                   <a:srgbClr val="C9A227"/>
                 </a:solidFill>
               </a:rPr>
-              <a:t>▪  </a:t>
+              <a:t>▪</a:t>
             </a:r>
             <a:r>
               <a:rPr sz="900" b="0">
@@ -4290,7 +4290,7 @@
                   <a:srgbClr val="C9A227"/>
                 </a:solidFill>
               </a:rPr>
-              <a:t>▪  </a:t>
+              <a:t>▪</a:t>
             </a:r>
             <a:r>
               <a:rPr sz="900" b="0">
@@ -4332,7 +4332,7 @@
                   <a:srgbClr val="C9A227"/>
                 </a:solidFill>
               </a:rPr>
-              <a:t>▪  </a:t>
+              <a:t>▪</a:t>
             </a:r>
             <a:r>
               <a:rPr sz="900" b="0">
@@ -4487,7 +4487,7 @@
                   <a:srgbClr val="C9A227"/>
                 </a:solidFill>
               </a:rPr>
-              <a:t>▪  </a:t>
+              <a:t>▪</a:t>
             </a:r>
             <a:r>
               <a:rPr sz="900" b="0">
@@ -4529,7 +4529,7 @@
                   <a:srgbClr val="C9A227"/>
                 </a:solidFill>
               </a:rPr>
-              <a:t>▪  </a:t>
+              <a:t>▪</a:t>
             </a:r>
             <a:r>
               <a:rPr sz="900" b="0">
@@ -4571,7 +4571,7 @@
                   <a:srgbClr val="C9A227"/>
                 </a:solidFill>
               </a:rPr>
-              <a:t>▪  </a:t>
+              <a:t>▪</a:t>
             </a:r>
             <a:r>
               <a:rPr sz="900" b="0">
@@ -4613,7 +4613,7 @@
                   <a:srgbClr val="C9A227"/>
                 </a:solidFill>
               </a:rPr>
-              <a:t>▪  </a:t>
+              <a:t>▪</a:t>
             </a:r>
             <a:r>
               <a:rPr sz="900" b="0">
@@ -4792,7 +4792,7 @@
                   <a:srgbClr val="5D6B7E"/>
                 </a:solidFill>
               </a:rPr>
-              <a:t>ISBMS · PGDM 2025–27 · AGENTIC AI &amp; ADVANCED ANALYTICS IN FINANCE</a:t>
+              <a:t>AI IN FINANCE · THE COMPLETE CRASH COURSE</a:t>
             </a:r>
           </a:p>
         </p:txBody>
@@ -5328,7 +5328,7 @@
                   <a:srgbClr val="C9A227"/>
                 </a:solidFill>
               </a:rPr>
-              <a:t>▪  </a:t>
+              <a:t>▪</a:t>
             </a:r>
             <a:r>
               <a:rPr sz="900" b="0">
@@ -5370,7 +5370,7 @@
                   <a:srgbClr val="C9A227"/>
                 </a:solidFill>
               </a:rPr>
-              <a:t>▪  </a:t>
+              <a:t>▪</a:t>
             </a:r>
             <a:r>
               <a:rPr sz="900" b="0">
@@ -5603,7 +5603,7 @@
                   <a:srgbClr val="C9A227"/>
                 </a:solidFill>
               </a:rPr>
-              <a:t>▪  </a:t>
+              <a:t>▪</a:t>
             </a:r>
             <a:r>
               <a:rPr sz="900" b="0">
@@ -5645,7 +5645,7 @@
                   <a:srgbClr val="C9A227"/>
                 </a:solidFill>
               </a:rPr>
-              <a:t>▪  </a:t>
+              <a:t>▪</a:t>
             </a:r>
             <a:r>
               <a:rPr sz="900" b="0">
@@ -5834,7 +5834,7 @@
                   <a:srgbClr val="C9A227"/>
                 </a:solidFill>
               </a:rPr>
-              <a:t>▪  </a:t>
+              <a:t>▪</a:t>
             </a:r>
             <a:r>
               <a:rPr sz="900" b="0">
@@ -5876,7 +5876,7 @@
                   <a:srgbClr val="C9A227"/>
                 </a:solidFill>
               </a:rPr>
-              <a:t>▪  </a:t>
+              <a:t>▪</a:t>
             </a:r>
             <a:r>
               <a:rPr sz="900" b="0">
@@ -5918,7 +5918,7 @@
                   <a:srgbClr val="C9A227"/>
                 </a:solidFill>
               </a:rPr>
-              <a:t>▪  </a:t>
+              <a:t>▪</a:t>
             </a:r>
             <a:r>
               <a:rPr sz="900" b="0">
@@ -6082,7 +6082,7 @@
                   <a:srgbClr val="C9A227"/>
                 </a:solidFill>
               </a:rPr>
-              <a:t>Sorting is the safest of the model's three jobs:  </a:t>
+              <a:t>Sorting is the safest of the model's three jobs:</a:t>
             </a:r>
             <a:r>
               <a:rPr sz="1200" b="0">
@@ -6124,7 +6124,7 @@
                   <a:srgbClr val="5D6B7E"/>
                 </a:solidFill>
               </a:rPr>
-              <a:t>ISBMS · PGDM 2025–27 · AGENTIC AI &amp; ADVANCED ANALYTICS IN FINANCE</a:t>
+              <a:t>AI IN FINANCE · THE COMPLETE CRASH COURSE</a:t>
             </a:r>
           </a:p>
         </p:txBody>
@@ -6434,7 +6434,7 @@
                   <a:srgbClr val="C9A227"/>
                 </a:solidFill>
               </a:rPr>
-              <a:t>TIP  </a:t>
+              <a:t>TIP</a:t>
             </a:r>
             <a:r>
               <a:rPr sz="900" b="0">
@@ -6614,7 +6614,7 @@
                   <a:srgbClr val="C9A227"/>
                 </a:solidFill>
               </a:rPr>
-              <a:t>TIP  </a:t>
+              <a:t>TIP</a:t>
             </a:r>
             <a:r>
               <a:rPr sz="900" b="0">
@@ -6794,7 +6794,7 @@
                   <a:srgbClr val="C9A227"/>
                 </a:solidFill>
               </a:rPr>
-              <a:t>TIP  </a:t>
+              <a:t>TIP</a:t>
             </a:r>
             <a:r>
               <a:rPr sz="900" b="0">
@@ -6974,7 +6974,7 @@
                   <a:srgbClr val="C9A227"/>
                 </a:solidFill>
               </a:rPr>
-              <a:t>TIP  </a:t>
+              <a:t>TIP</a:t>
             </a:r>
             <a:r>
               <a:rPr sz="900" b="0">
@@ -7154,7 +7154,7 @@
                   <a:srgbClr val="C9A227"/>
                 </a:solidFill>
               </a:rPr>
-              <a:t>TIP  </a:t>
+              <a:t>TIP</a:t>
             </a:r>
             <a:r>
               <a:rPr sz="900" b="0">
@@ -7334,7 +7334,7 @@
                   <a:srgbClr val="C9A227"/>
                 </a:solidFill>
               </a:rPr>
-              <a:t>TIP  </a:t>
+              <a:t>TIP</a:t>
             </a:r>
             <a:r>
               <a:rPr sz="900" b="0">
@@ -7514,7 +7514,7 @@
                   <a:srgbClr val="C9A227"/>
                 </a:solidFill>
               </a:rPr>
-              <a:t>TIP  </a:t>
+              <a:t>TIP</a:t>
             </a:r>
             <a:r>
               <a:rPr sz="900" b="0">
@@ -7644,7 +7644,7 @@
                   <a:srgbClr val="C9A227"/>
                 </a:solidFill>
               </a:rPr>
-              <a:t>Before Session 9:  </a:t>
+              <a:t>Before Session 9:</a:t>
             </a:r>
             <a:r>
               <a:rPr sz="1100" b="0">
@@ -8050,7 +8050,7 @@
                   <a:srgbClr val="C9A227"/>
                 </a:solidFill>
               </a:rPr>
-              <a:t>▪  </a:t>
+              <a:t>▪</a:t>
             </a:r>
             <a:r>
               <a:rPr sz="1000" b="0">
@@ -8092,7 +8092,7 @@
                   <a:srgbClr val="C9A227"/>
                 </a:solidFill>
               </a:rPr>
-              <a:t>▪  </a:t>
+              <a:t>▪</a:t>
             </a:r>
             <a:r>
               <a:rPr sz="1000" b="0">
@@ -8134,7 +8134,7 @@
                   <a:srgbClr val="C9A227"/>
                 </a:solidFill>
               </a:rPr>
-              <a:t>▪  </a:t>
+              <a:t>▪</a:t>
             </a:r>
             <a:r>
               <a:rPr sz="1000" b="0">
@@ -8176,7 +8176,7 @@
                   <a:srgbClr val="C9A227"/>
                 </a:solidFill>
               </a:rPr>
-              <a:t>▪  </a:t>
+              <a:t>▪</a:t>
             </a:r>
             <a:r>
               <a:rPr sz="1000" b="0">
@@ -8375,7 +8375,7 @@
                   <a:srgbClr val="C9A227"/>
                 </a:solidFill>
               </a:rPr>
-              <a:t>▪  </a:t>
+              <a:t>▪</a:t>
             </a:r>
             <a:r>
               <a:rPr sz="1000" b="0">
@@ -8417,7 +8417,7 @@
                   <a:srgbClr val="C9A227"/>
                 </a:solidFill>
               </a:rPr>
-              <a:t>▪  </a:t>
+              <a:t>▪</a:t>
             </a:r>
             <a:r>
               <a:rPr sz="1000" b="0">
@@ -8459,7 +8459,7 @@
                   <a:srgbClr val="C9A227"/>
                 </a:solidFill>
               </a:rPr>
-              <a:t>▪  </a:t>
+              <a:t>▪</a:t>
             </a:r>
             <a:r>
               <a:rPr sz="1000" b="0">
@@ -8501,7 +8501,7 @@
                   <a:srgbClr val="C9A227"/>
                 </a:solidFill>
               </a:rPr>
-              <a:t>▪  </a:t>
+              <a:t>▪</a:t>
             </a:r>
             <a:r>
               <a:rPr sz="1000" b="0">
@@ -8700,7 +8700,7 @@
                   <a:srgbClr val="C9A227"/>
                 </a:solidFill>
               </a:rPr>
-              <a:t>▪  </a:t>
+              <a:t>▪</a:t>
             </a:r>
             <a:r>
               <a:rPr sz="1000" b="0">
@@ -8742,7 +8742,7 @@
                   <a:srgbClr val="C9A227"/>
                 </a:solidFill>
               </a:rPr>
-              <a:t>▪  </a:t>
+              <a:t>▪</a:t>
             </a:r>
             <a:r>
               <a:rPr sz="1000" b="0">
@@ -8784,7 +8784,7 @@
                   <a:srgbClr val="C9A227"/>
                 </a:solidFill>
               </a:rPr>
-              <a:t>▪  </a:t>
+              <a:t>▪</a:t>
             </a:r>
             <a:r>
               <a:rPr sz="1000" b="0">
@@ -8826,7 +8826,7 @@
                   <a:srgbClr val="C9A227"/>
                 </a:solidFill>
               </a:rPr>
-              <a:t>▪  </a:t>
+              <a:t>▪</a:t>
             </a:r>
             <a:r>
               <a:rPr sz="1000" b="0">
@@ -8956,7 +8956,7 @@
                   <a:srgbClr val="3A5C9E"/>
                 </a:solidFill>
               </a:rPr>
-              <a:t>THE ENGINE IS NOT THE DELIVERABLE.  </a:t>
+              <a:t>THE ENGINE IS NOT THE DELIVERABLE.</a:t>
             </a:r>
             <a:r>
               <a:rPr sz="1100" b="0">
@@ -9086,7 +9086,7 @@
                   <a:srgbClr val="C9A227"/>
                 </a:solidFill>
               </a:rPr>
-              <a:t>The whole module in one line:  </a:t>
+              <a:t>The whole module in one line:</a:t>
             </a:r>
             <a:r>
               <a:rPr sz="1200" b="0">
@@ -9128,7 +9128,7 @@
                   <a:srgbClr val="5D6B7E"/>
                 </a:solidFill>
               </a:rPr>
-              <a:t>ISBMS · PGDM 2025–27 · AGENTIC AI &amp; ADVANCED ANALYTICS IN FINANCE</a:t>
+              <a:t>AI IN FINANCE · THE COMPLETE CRASH COURSE</a:t>
             </a:r>
           </a:p>
         </p:txBody>
@@ -9571,7 +9571,7 @@
                   <a:srgbClr val="C9A227"/>
                 </a:solidFill>
               </a:rPr>
-              <a:t>▪  </a:t>
+              <a:t>▪</a:t>
             </a:r>
             <a:r>
               <a:rPr sz="1000" b="0">
@@ -9613,7 +9613,7 @@
                   <a:srgbClr val="C9A227"/>
                 </a:solidFill>
               </a:rPr>
-              <a:t>▪  </a:t>
+              <a:t>▪</a:t>
             </a:r>
             <a:r>
               <a:rPr sz="1000" b="0">
@@ -9655,7 +9655,7 @@
                   <a:srgbClr val="C9A227"/>
                 </a:solidFill>
               </a:rPr>
-              <a:t>▪  </a:t>
+              <a:t>▪</a:t>
             </a:r>
             <a:r>
               <a:rPr sz="1000" b="0">
@@ -9854,7 +9854,7 @@
                   <a:srgbClr val="C9A227"/>
                 </a:solidFill>
               </a:rPr>
-              <a:t>▪  </a:t>
+              <a:t>▪</a:t>
             </a:r>
             <a:r>
               <a:rPr sz="1000" b="0">
@@ -9896,7 +9896,7 @@
                   <a:srgbClr val="C9A227"/>
                 </a:solidFill>
               </a:rPr>
-              <a:t>▪  </a:t>
+              <a:t>▪</a:t>
             </a:r>
             <a:r>
               <a:rPr sz="1000" b="0">
@@ -9938,7 +9938,7 @@
                   <a:srgbClr val="C9A227"/>
                 </a:solidFill>
               </a:rPr>
-              <a:t>▪  </a:t>
+              <a:t>▪</a:t>
             </a:r>
             <a:r>
               <a:rPr sz="1000" b="0">
@@ -10137,7 +10137,7 @@
                   <a:srgbClr val="C9A227"/>
                 </a:solidFill>
               </a:rPr>
-              <a:t>▪  </a:t>
+              <a:t>▪</a:t>
             </a:r>
             <a:r>
               <a:rPr sz="1000" b="0">
@@ -10179,7 +10179,7 @@
                   <a:srgbClr val="C9A227"/>
                 </a:solidFill>
               </a:rPr>
-              <a:t>▪  </a:t>
+              <a:t>▪</a:t>
             </a:r>
             <a:r>
               <a:rPr sz="1000" b="0">
@@ -10221,7 +10221,7 @@
                   <a:srgbClr val="C9A227"/>
                 </a:solidFill>
               </a:rPr>
-              <a:t>▪  </a:t>
+              <a:t>▪</a:t>
             </a:r>
             <a:r>
               <a:rPr sz="1000" b="0">
@@ -10488,7 +10488,7 @@
                   <a:srgbClr val="C9A227"/>
                 </a:solidFill>
               </a:rPr>
-              <a:t>The Madoff lesson in one line:  </a:t>
+              <a:t>The Madoff lesson in one line:</a:t>
             </a:r>
             <a:r>
               <a:rPr sz="1200" b="0">
@@ -10530,7 +10530,7 @@
                   <a:srgbClr val="5D6B7E"/>
                 </a:solidFill>
               </a:rPr>
-              <a:t>ISBMS · PGDM 2025–27 · AGENTIC AI &amp; ADVANCED ANALYTICS IN FINANCE</a:t>
+              <a:t>AI IN FINANCE · THE COMPLETE CRASH COURSE</a:t>
             </a:r>
           </a:p>
         </p:txBody>
@@ -11761,7 +11761,7 @@
                   <a:srgbClr val="C9A227"/>
                 </a:solidFill>
               </a:rPr>
-              <a:t>Book a corporate action on the wrong day and the check that catches it is not the price check:  </a:t>
+              <a:t>Book a corporate action on the wrong day and the check that catches it is not the price check:</a:t>
             </a:r>
             <a:r>
               <a:rPr sz="1200" b="0">
@@ -11803,7 +11803,7 @@
                   <a:srgbClr val="5D6B7E"/>
                 </a:solidFill>
               </a:rPr>
-              <a:t>ISBMS · PGDM 2025–27 · AGENTIC AI &amp; ADVANCED ANALYTICS IN FINANCE</a:t>
+              <a:t>AI IN FINANCE · THE COMPLETE CRASH COURSE</a:t>
             </a:r>
           </a:p>
         </p:txBody>
@@ -13180,7 +13180,7 @@
                   <a:srgbClr val="C9A227"/>
                 </a:solidFill>
               </a:rPr>
-              <a:t>Rank them by danger, not by size:  </a:t>
+              <a:t>Rank them by danger, not by size:</a:t>
             </a:r>
             <a:r>
               <a:rPr sz="1200" b="0">
@@ -13222,7 +13222,7 @@
                   <a:srgbClr val="5D6B7E"/>
                 </a:solidFill>
               </a:rPr>
-              <a:t>ISBMS · PGDM 2025–27 · AGENTIC AI &amp; ADVANCED ANALYTICS IN FINANCE</a:t>
+              <a:t>AI IN FINANCE · THE COMPLETE CRASH COURSE</a:t>
             </a:r>
           </a:p>
         </p:txBody>
@@ -13576,7 +13576,7 @@
                   <a:srgbClr val="C9A227"/>
                 </a:solidFill>
               </a:rPr>
-              <a:t>▪  </a:t>
+              <a:t>▪</a:t>
             </a:r>
             <a:r>
               <a:rPr sz="950" b="0">
@@ -13618,7 +13618,7 @@
                   <a:srgbClr val="C9A227"/>
                 </a:solidFill>
               </a:rPr>
-              <a:t>▪  </a:t>
+              <a:t>▪</a:t>
             </a:r>
             <a:r>
               <a:rPr sz="950" b="0">
@@ -13660,7 +13660,7 @@
                   <a:srgbClr val="C9A227"/>
                 </a:solidFill>
               </a:rPr>
-              <a:t>▪  </a:t>
+              <a:t>▪</a:t>
             </a:r>
             <a:r>
               <a:rPr sz="950" b="0">
@@ -13702,7 +13702,7 @@
                   <a:srgbClr val="C9A227"/>
                 </a:solidFill>
               </a:rPr>
-              <a:t>▪  </a:t>
+              <a:t>▪</a:t>
             </a:r>
             <a:r>
               <a:rPr sz="950" b="0">
@@ -13901,7 +13901,7 @@
                   <a:srgbClr val="C9A227"/>
                 </a:solidFill>
               </a:rPr>
-              <a:t>▪  </a:t>
+              <a:t>▪</a:t>
             </a:r>
             <a:r>
               <a:rPr sz="950" b="0">
@@ -13943,7 +13943,7 @@
                   <a:srgbClr val="C9A227"/>
                 </a:solidFill>
               </a:rPr>
-              <a:t>▪  </a:t>
+              <a:t>▪</a:t>
             </a:r>
             <a:r>
               <a:rPr sz="950" b="0">
@@ -13985,7 +13985,7 @@
                   <a:srgbClr val="C9A227"/>
                 </a:solidFill>
               </a:rPr>
-              <a:t>▪  </a:t>
+              <a:t>▪</a:t>
             </a:r>
             <a:r>
               <a:rPr sz="950" b="0">
@@ -14027,7 +14027,7 @@
                   <a:srgbClr val="C9A227"/>
                 </a:solidFill>
               </a:rPr>
-              <a:t>▪  </a:t>
+              <a:t>▪</a:t>
             </a:r>
             <a:r>
               <a:rPr sz="950" b="0">
@@ -14226,7 +14226,7 @@
                   <a:srgbClr val="C9A227"/>
                 </a:solidFill>
               </a:rPr>
-              <a:t>▪  </a:t>
+              <a:t>▪</a:t>
             </a:r>
             <a:r>
               <a:rPr sz="950" b="0">
@@ -14268,7 +14268,7 @@
                   <a:srgbClr val="C9A227"/>
                 </a:solidFill>
               </a:rPr>
-              <a:t>▪  </a:t>
+              <a:t>▪</a:t>
             </a:r>
             <a:r>
               <a:rPr sz="950" b="0">
@@ -14310,7 +14310,7 @@
                   <a:srgbClr val="C9A227"/>
                 </a:solidFill>
               </a:rPr>
-              <a:t>▪  </a:t>
+              <a:t>▪</a:t>
             </a:r>
             <a:r>
               <a:rPr sz="950" b="0">
@@ -14352,7 +14352,7 @@
                   <a:srgbClr val="C9A227"/>
                 </a:solidFill>
               </a:rPr>
-              <a:t>▪  </a:t>
+              <a:t>▪</a:t>
             </a:r>
             <a:r>
               <a:rPr sz="950" b="0">
@@ -14482,7 +14482,7 @@
                   <a:srgbClr val="C9A227"/>
                 </a:solidFill>
               </a:rPr>
-              <a:t>Monitoring does not stop at onboarding:  </a:t>
+              <a:t>Monitoring does not stop at onboarding:</a:t>
             </a:r>
             <a:r>
               <a:rPr sz="1200" b="0">
@@ -14524,7 +14524,7 @@
                   <a:srgbClr val="5D6B7E"/>
                 </a:solidFill>
               </a:rPr>
-              <a:t>ISBMS · PGDM 2025–27 · AGENTIC AI &amp; ADVANCED ANALYTICS IN FINANCE</a:t>
+              <a:t>AI IN FINANCE · THE COMPLETE CRASH COURSE</a:t>
             </a:r>
           </a:p>
         </p:txBody>
@@ -16283,7 +16283,7 @@
                   <a:srgbClr val="C9A227"/>
                 </a:solidFill>
               </a:rPr>
-              <a:t>The dotted arrow runs from the exception engine back to the price feed:  </a:t>
+              <a:t>The dotted arrow runs from the exception engine back to the price feed:</a:t>
             </a:r>
             <a:r>
               <a:rPr sz="1200" b="0">
@@ -16325,7 +16325,7 @@
                   <a:srgbClr val="5D6B7E"/>
                 </a:solidFill>
               </a:rPr>
-              <a:t>ISBMS · PGDM 2025–27 · AGENTIC AI &amp; ADVANCED ANALYTICS IN FINANCE</a:t>
+              <a:t>AI IN FINANCE · THE COMPLETE CRASH COURSE</a:t>
             </a:r>
           </a:p>
         </p:txBody>
@@ -16973,7 +16973,7 @@
                 </a:solidFill>
                 <a:latin typeface="Consolas"/>
               </a:rPr>
-              <a:t> </a:t>
+              <a:t/>
             </a:r>
           </a:p>
           <a:p>
@@ -16997,7 +16997,7 @@
                 </a:solidFill>
                 <a:latin typeface="Consolas"/>
               </a:rPr>
-              <a:t>  none. NAV may be released after the four-eyes check.</a:t>
+              <a:t>none. NAV may be released after the four-eyes check.</a:t>
             </a:r>
           </a:p>
           <a:p>
@@ -17009,7 +17009,7 @@
                 </a:solidFill>
                 <a:latin typeface="Consolas"/>
               </a:rPr>
-              <a:t>  NAV STATUS: READY FOR REVIEW.</a:t>
+              <a:t>NAV STATUS: READY FOR REVIEW.</a:t>
             </a:r>
           </a:p>
         </p:txBody>
@@ -17180,7 +17180,7 @@
                   <a:srgbClr val="5D6B7E"/>
                 </a:solidFill>
               </a:rPr>
-              <a:t>ISBMS · PGDM 2025–27 · AGENTIC AI &amp; ADVANCED ANALYTICS IN FINANCE</a:t>
+              <a:t>AI IN FINANCE · THE COMPLETE CRASH COURSE</a:t>
             </a:r>
           </a:p>
         </p:txBody>
@@ -17708,7 +17708,7 @@
                 </a:solidFill>
                 <a:latin typeface="Consolas"/>
               </a:rPr>
-              <a:t> </a:t>
+              <a:t/>
             </a:r>
           </a:p>
           <a:p>
@@ -17732,7 +17732,7 @@
                 </a:solidFill>
                 <a:latin typeface="Consolas"/>
               </a:rPr>
-              <a:t>  * MSFT: STALE DATE. Price dated 2026-09-15, fund priced as of 2026-09-18.</a:t>
+              <a:t>* MSFT: STALE DATE. Price dated 2026-09-15, fund priced as of 2026-09-18.</a:t>
             </a:r>
           </a:p>
           <a:p>
@@ -17744,7 +17744,7 @@
                 </a:solidFill>
                 <a:latin typeface="Consolas"/>
               </a:rPr>
-              <a:t>  * XOM: MISSING PRICE. Cannot value 2,500 shares. Hold the NAV.</a:t>
+              <a:t>* XOM: MISSING PRICE. Cannot value 2,500 shares. Hold the NAV.</a:t>
             </a:r>
           </a:p>
           <a:p>
@@ -17756,7 +17756,7 @@
                 </a:solidFill>
                 <a:latin typeface="Consolas"/>
               </a:rPr>
-              <a:t>  NAV STATUS: HELD. A missing price means the number above is incomplete.</a:t>
+              <a:t>NAV STATUS: HELD. A missing price means the number above is incomplete.</a:t>
             </a:r>
           </a:p>
         </p:txBody>
@@ -18015,7 +18015,7 @@
                   <a:srgbClr val="C9A227"/>
                 </a:solidFill>
               </a:rPr>
-              <a:t>Now go and break it in ways the script did not anticipate:  </a:t>
+              <a:t>Now go and break it in ways the script did not anticipate:</a:t>
             </a:r>
             <a:r>
               <a:rPr sz="1200" b="0">
@@ -18057,7 +18057,7 @@
                   <a:srgbClr val="5D6B7E"/>
                 </a:solidFill>
               </a:rPr>
-              <a:t>ISBMS · PGDM 2025–27 · AGENTIC AI &amp; ADVANCED ANALYTICS IN FINANCE</a:t>
+              <a:t>AI IN FINANCE · THE COMPLETE CRASH COURSE</a:t>
             </a:r>
           </a:p>
         </p:txBody>
